--- a/practice_advanced/fig/slide.pptx
+++ b/practice_advanced/fig/slide.pptx
@@ -235,7 +235,7 @@
           </a:lstStyle>
           <a:p>
             <a:fld id="{6B8D1B20-A248-FB47-8240-73C0C5F47C9D}" type="datetimeFigureOut">
-              <a:t>2025/10/24</a:t>
+              <a:t>2026/10/14</a:t>
             </a:fld>
             <a:endParaRPr kumimoji="1" lang="ja-JP" altLang="en-US"/>
           </a:p>
@@ -8075,6 +8075,173 @@
           </a:p>
         </p:txBody>
       </p:sp>
+      <p:pic>
+        <p:nvPicPr>
+          <p:cNvPr id="27" name="図 26">
+            <a:extLst>
+              <a:ext uri="{FF2B5EF4-FFF2-40B4-BE49-F238E27FC236}">
+                <a16:creationId xmlns:a16="http://schemas.microsoft.com/office/drawing/2014/main" id="{F7423C21-35DF-12B2-D5B0-24506D2AD1F2}"/>
+              </a:ext>
+            </a:extLst>
+          </p:cNvPr>
+          <p:cNvPicPr>
+            <a:picLocks noChangeAspect="1"/>
+          </p:cNvPicPr>
+          <p:nvPr/>
+        </p:nvPicPr>
+        <p:blipFill>
+          <a:blip r:embed="rId2"/>
+          <a:stretch>
+            <a:fillRect/>
+          </a:stretch>
+        </p:blipFill>
+        <p:spPr>
+          <a:xfrm>
+            <a:off x="4093196" y="5372647"/>
+            <a:ext cx="3981941" cy="1378960"/>
+          </a:xfrm>
+          <a:prstGeom prst="rect">
+            <a:avLst/>
+          </a:prstGeom>
+        </p:spPr>
+      </p:pic>
+      <p:sp>
+        <p:nvSpPr>
+          <p:cNvPr id="28" name="テキスト ボックス 27">
+            <a:extLst>
+              <a:ext uri="{FF2B5EF4-FFF2-40B4-BE49-F238E27FC236}">
+                <a16:creationId xmlns:a16="http://schemas.microsoft.com/office/drawing/2014/main" id="{D0E49967-A3C3-A194-7258-91FEFCAE2A16}"/>
+              </a:ext>
+            </a:extLst>
+          </p:cNvPr>
+          <p:cNvSpPr txBox="1"/>
+          <p:nvPr/>
+        </p:nvSpPr>
+        <p:spPr>
+          <a:xfrm>
+            <a:off x="4067943" y="4946807"/>
+            <a:ext cx="3679212" cy="276999"/>
+          </a:xfrm>
+          <a:prstGeom prst="rect">
+            <a:avLst/>
+          </a:prstGeom>
+          <a:noFill/>
+        </p:spPr>
+        <p:txBody>
+          <a:bodyPr wrap="none" rtlCol="0">
+            <a:spAutoFit/>
+          </a:bodyPr>
+          <a:lstStyle/>
+          <a:p>
+            <a:r>
+              <a:rPr kumimoji="1" lang="en-US" altLang="ja-JP" sz="1200" dirty="0"/>
+              <a:t>VSCode</a:t>
+            </a:r>
+            <a:r>
+              <a:rPr kumimoji="1" lang="ja-JP" altLang="en-US" sz="1200" dirty="0"/>
+              <a:t>で「入力側の変更を取り込む」を選ぶと楽</a:t>
+            </a:r>
+          </a:p>
+        </p:txBody>
+      </p:sp>
+      <p:sp>
+        <p:nvSpPr>
+          <p:cNvPr id="29" name="四角形: 角を丸くする 28">
+            <a:extLst>
+              <a:ext uri="{FF2B5EF4-FFF2-40B4-BE49-F238E27FC236}">
+                <a16:creationId xmlns:a16="http://schemas.microsoft.com/office/drawing/2014/main" id="{D275F4DA-E7C5-05D2-474A-7908B8A8DD0F}"/>
+              </a:ext>
+            </a:extLst>
+          </p:cNvPr>
+          <p:cNvSpPr/>
+          <p:nvPr/>
+        </p:nvSpPr>
+        <p:spPr>
+          <a:xfrm>
+            <a:off x="6079406" y="5839795"/>
+            <a:ext cx="576064" cy="92818"/>
+          </a:xfrm>
+          <a:prstGeom prst="roundRect">
+            <a:avLst/>
+          </a:prstGeom>
+          <a:noFill/>
+          <a:ln w="12700">
+            <a:solidFill>
+              <a:srgbClr val="FF0000"/>
+            </a:solidFill>
+          </a:ln>
+        </p:spPr>
+        <p:style>
+          <a:lnRef idx="2">
+            <a:schemeClr val="accent1">
+              <a:shade val="50000"/>
+            </a:schemeClr>
+          </a:lnRef>
+          <a:fillRef idx="1">
+            <a:schemeClr val="accent1"/>
+          </a:fillRef>
+          <a:effectRef idx="0">
+            <a:schemeClr val="accent1"/>
+          </a:effectRef>
+          <a:fontRef idx="minor">
+            <a:schemeClr val="lt1"/>
+          </a:fontRef>
+        </p:style>
+        <p:txBody>
+          <a:bodyPr rtlCol="0" anchor="ctr"/>
+          <a:lstStyle/>
+          <a:p>
+            <a:pPr algn="ctr"/>
+            <a:endParaRPr kumimoji="1" lang="ja-JP" altLang="en-US"/>
+          </a:p>
+        </p:txBody>
+      </p:sp>
+      <p:cxnSp>
+        <p:nvCxnSpPr>
+          <p:cNvPr id="31" name="コネクタ: カギ線 30">
+            <a:extLst>
+              <a:ext uri="{FF2B5EF4-FFF2-40B4-BE49-F238E27FC236}">
+                <a16:creationId xmlns:a16="http://schemas.microsoft.com/office/drawing/2014/main" id="{8FFF0CF1-5300-7388-23A5-4065BFBD7F99}"/>
+              </a:ext>
+            </a:extLst>
+          </p:cNvPr>
+          <p:cNvCxnSpPr>
+            <a:stCxn id="28" idx="2"/>
+            <a:endCxn id="29" idx="0"/>
+          </p:cNvCxnSpPr>
+          <p:nvPr/>
+        </p:nvCxnSpPr>
+        <p:spPr>
+          <a:xfrm rot="16200000" flipH="1">
+            <a:off x="5829499" y="5301855"/>
+            <a:ext cx="615989" cy="459889"/>
+          </a:xfrm>
+          <a:prstGeom prst="bentConnector3">
+            <a:avLst/>
+          </a:prstGeom>
+          <a:ln>
+            <a:solidFill>
+              <a:srgbClr val="FF0000"/>
+            </a:solidFill>
+            <a:headEnd type="none" w="med" len="med"/>
+            <a:tailEnd type="triangle"/>
+          </a:ln>
+        </p:spPr>
+        <p:style>
+          <a:lnRef idx="1">
+            <a:schemeClr val="accent1"/>
+          </a:lnRef>
+          <a:fillRef idx="0">
+            <a:schemeClr val="accent1"/>
+          </a:fillRef>
+          <a:effectRef idx="0">
+            <a:schemeClr val="accent1"/>
+          </a:effectRef>
+          <a:fontRef idx="minor">
+            <a:schemeClr val="tx1"/>
+          </a:fontRef>
+        </p:style>
+      </p:cxnSp>
     </p:spTree>
     <p:extLst>
       <p:ext uri="{BB962C8B-B14F-4D97-AF65-F5344CB8AC3E}">
